--- a/tests/OfficeAgent.Tests/Corpus/v1.0.0/native/inputs/p-setchartdata.pptx
+++ b/tests/OfficeAgent.Tests/Corpus/v1.0.0/native/inputs/p-setchartdata.pptx
@@ -2,10 +2,10 @@
 <file path=ppt/presentation.xml><?xml version="1.0" encoding="utf-8"?>
 <p:presentation xmlns:r="http://schemas.openxmlformats.org/officeDocument/2006/relationships" xmlns:p="http://schemas.openxmlformats.org/presentationml/2006/main">
   <p:sldMasterIdLst>
-    <p:sldMasterId xmlns:r="http://schemas.openxmlformats.org/officeDocument/2006/relationships" id="2147483648" r:id="R3359ef089de1432f"/>
+    <p:sldMasterId xmlns:r="http://schemas.openxmlformats.org/officeDocument/2006/relationships" id="2147483648" r:id="R135454fca18a4385"/>
   </p:sldMasterIdLst>
   <p:sldIdLst>
-    <p:sldId xmlns:r="http://schemas.openxmlformats.org/officeDocument/2006/relationships" id="256" r:id="Rb33f5559dd094925"/>
+    <p:sldId xmlns:r="http://schemas.openxmlformats.org/officeDocument/2006/relationships" id="256" r:id="R69c91fc9e3c24763"/>
   </p:sldIdLst>
   <p:sldSz cx="12192000" cy="6858000"/>
   <p:notesSz cx="6858000" cy="9144000"/>
@@ -386,11 +386,11 @@
   </p:cSld>
   <p:clrMap bg1="lt1" tx1="dk1" bg2="lt2" tx2="dk2" accent1="accent1" accent2="accent2" accent3="accent3" accent4="accent4" accent5="accent5" accent6="accent6" hlink="hlink" folHlink="folHlink"/>
   <p:sldLayoutIdLst>
-    <p:sldLayoutId xmlns:r="http://schemas.openxmlformats.org/officeDocument/2006/relationships" id="2147483649" r:id="Ra7938f6f3a444dbe"/>
-    <p:sldLayoutId xmlns:r="http://schemas.openxmlformats.org/officeDocument/2006/relationships" id="2147483650" r:id="R8bec3945cca04cf6"/>
-    <p:sldLayoutId xmlns:r="http://schemas.openxmlformats.org/officeDocument/2006/relationships" id="2147483651" r:id="Rfba02e826ae04d23"/>
-    <p:sldLayoutId xmlns:r="http://schemas.openxmlformats.org/officeDocument/2006/relationships" id="2147483652" r:id="R6d83a2ee2d7348d5"/>
-    <p:sldLayoutId xmlns:r="http://schemas.openxmlformats.org/officeDocument/2006/relationships" id="2147483653" r:id="R274ddace9ec24d63"/>
+    <p:sldLayoutId xmlns:r="http://schemas.openxmlformats.org/officeDocument/2006/relationships" id="2147483649" r:id="Rc410313673eb4863"/>
+    <p:sldLayoutId xmlns:r="http://schemas.openxmlformats.org/officeDocument/2006/relationships" id="2147483650" r:id="R7d9586aed7f24a4c"/>
+    <p:sldLayoutId xmlns:r="http://schemas.openxmlformats.org/officeDocument/2006/relationships" id="2147483651" r:id="Rd65691fc91b84ec3"/>
+    <p:sldLayoutId xmlns:r="http://schemas.openxmlformats.org/officeDocument/2006/relationships" id="2147483652" r:id="Rfbfff30c31a244a3"/>
+    <p:sldLayoutId xmlns:r="http://schemas.openxmlformats.org/officeDocument/2006/relationships" id="2147483653" r:id="R80277943fbb64daf"/>
   </p:sldLayoutIdLst>
 </p:sldMaster>
 </file>
@@ -631,7 +631,7 @@
     <c:plotVisOnly val="1"/>
     <c:dispBlanksAs val="gap"/>
   </c:chart>
-  <c:externalData xmlns:r="http://schemas.openxmlformats.org/officeDocument/2006/relationships" r:id="R6886ec7ece7a4619">
+  <c:externalData xmlns:r="http://schemas.openxmlformats.org/officeDocument/2006/relationships" r:id="R8efa791e9a7d4535">
     <c:autoUpdate val="0"/>
   </c:externalData>
 </c:chartSpace>
@@ -678,7 +678,7 @@
         </p:xfrm>
         <a:graphic>
           <a:graphicData uri="http://schemas.openxmlformats.org/drawingml/2006/chart">
-            <c:chart xmlns:r="http://schemas.openxmlformats.org/officeDocument/2006/relationships" xmlns:c="http://schemas.openxmlformats.org/drawingml/2006/chart" r:id="R1d56e809b45b4e99"/>
+            <c:chart xmlns:r="http://schemas.openxmlformats.org/officeDocument/2006/relationships" xmlns:c="http://schemas.openxmlformats.org/drawingml/2006/chart" r:id="R650f389e88fc4302"/>
           </a:graphicData>
         </a:graphic>
       </p:graphicFrame>

--- a/tests/OfficeAgent.Tests/Corpus/v1.0.0/native/inputs/p-setchartdata.pptx
+++ b/tests/OfficeAgent.Tests/Corpus/v1.0.0/native/inputs/p-setchartdata.pptx
@@ -2,10 +2,10 @@
 <file path=ppt/presentation.xml><?xml version="1.0" encoding="utf-8"?>
 <p:presentation xmlns:r="http://schemas.openxmlformats.org/officeDocument/2006/relationships" xmlns:p="http://schemas.openxmlformats.org/presentationml/2006/main">
   <p:sldMasterIdLst>
-    <p:sldMasterId xmlns:r="http://schemas.openxmlformats.org/officeDocument/2006/relationships" id="2147483648" r:id="R135454fca18a4385"/>
+    <p:sldMasterId xmlns:r="http://schemas.openxmlformats.org/officeDocument/2006/relationships" id="2147483648" r:id="R82c43903bcd84b03"/>
   </p:sldMasterIdLst>
   <p:sldIdLst>
-    <p:sldId xmlns:r="http://schemas.openxmlformats.org/officeDocument/2006/relationships" id="256" r:id="R69c91fc9e3c24763"/>
+    <p:sldId xmlns:r="http://schemas.openxmlformats.org/officeDocument/2006/relationships" id="256" r:id="Rb77733694a3248a4"/>
   </p:sldIdLst>
   <p:sldSz cx="12192000" cy="6858000"/>
   <p:notesSz cx="6858000" cy="9144000"/>
@@ -13,7 +13,7 @@
 </file>
 
 <file path=ppt/slideLayouts/slideLayout1.xml><?xml version="1.0" encoding="utf-8"?>
-<p:sldLayout xmlns:p="http://schemas.openxmlformats.org/presentationml/2006/main" type="title">
+<p:sldLayout xmlns:a="http://schemas.openxmlformats.org/drawingml/2006/main" xmlns:p="http://schemas.openxmlformats.org/presentationml/2006/main" type="title">
   <p:cSld name="Title Slide">
     <p:spTree>
       <p:nvGrpSpPr>
@@ -91,7 +91,7 @@
 </file>
 
 <file path=ppt/slideLayouts/slideLayout2.xml><?xml version="1.0" encoding="utf-8"?>
-<p:sldLayout xmlns:p="http://schemas.openxmlformats.org/presentationml/2006/main" type="obj">
+<p:sldLayout xmlns:a="http://schemas.openxmlformats.org/drawingml/2006/main" xmlns:p="http://schemas.openxmlformats.org/presentationml/2006/main" type="obj">
   <p:cSld name="Title and Content">
     <p:spTree>
       <p:nvGrpSpPr>
@@ -169,7 +169,7 @@
 </file>
 
 <file path=ppt/slideLayouts/slideLayout3.xml><?xml version="1.0" encoding="utf-8"?>
-<p:sldLayout xmlns:p="http://schemas.openxmlformats.org/presentationml/2006/main" type="secHead">
+<p:sldLayout xmlns:a="http://schemas.openxmlformats.org/drawingml/2006/main" xmlns:p="http://schemas.openxmlformats.org/presentationml/2006/main" type="secHead">
   <p:cSld name="Section Header">
     <p:spTree>
       <p:nvGrpSpPr>
@@ -247,7 +247,7 @@
 </file>
 
 <file path=ppt/slideLayouts/slideLayout4.xml><?xml version="1.0" encoding="utf-8"?>
-<p:sldLayout xmlns:p="http://schemas.openxmlformats.org/presentationml/2006/main" type="titleOnly">
+<p:sldLayout xmlns:a="http://schemas.openxmlformats.org/drawingml/2006/main" xmlns:p="http://schemas.openxmlformats.org/presentationml/2006/main" type="titleOnly">
   <p:cSld name="Title Only">
     <p:spTree>
       <p:nvGrpSpPr>
@@ -295,7 +295,7 @@
 </file>
 
 <file path=ppt/slideLayouts/slideLayout5.xml><?xml version="1.0" encoding="utf-8"?>
-<p:sldLayout xmlns:p="http://schemas.openxmlformats.org/presentationml/2006/main" type="blank">
+<p:sldLayout xmlns:a="http://schemas.openxmlformats.org/drawingml/2006/main" xmlns:p="http://schemas.openxmlformats.org/presentationml/2006/main" type="blank">
   <p:cSld name="Blank">
     <p:spTree>
       <p:nvGrpSpPr>
@@ -313,7 +313,7 @@
 </file>
 
 <file path=ppt/slideMasters/slideMaster1.xml><?xml version="1.0" encoding="utf-8"?>
-<p:sldMaster xmlns:p="http://schemas.openxmlformats.org/presentationml/2006/main">
+<p:sldMaster xmlns:a="http://schemas.openxmlformats.org/drawingml/2006/main" xmlns:r="http://schemas.openxmlformats.org/officeDocument/2006/relationships" xmlns:p="http://schemas.openxmlformats.org/presentationml/2006/main">
   <p:cSld>
     <p:spTree>
       <p:nvGrpSpPr>
@@ -386,11 +386,11 @@
   </p:cSld>
   <p:clrMap bg1="lt1" tx1="dk1" bg2="lt2" tx2="dk2" accent1="accent1" accent2="accent2" accent3="accent3" accent4="accent4" accent5="accent5" accent6="accent6" hlink="hlink" folHlink="folHlink"/>
   <p:sldLayoutIdLst>
-    <p:sldLayoutId xmlns:r="http://schemas.openxmlformats.org/officeDocument/2006/relationships" id="2147483649" r:id="Rc410313673eb4863"/>
-    <p:sldLayoutId xmlns:r="http://schemas.openxmlformats.org/officeDocument/2006/relationships" id="2147483650" r:id="R7d9586aed7f24a4c"/>
-    <p:sldLayoutId xmlns:r="http://schemas.openxmlformats.org/officeDocument/2006/relationships" id="2147483651" r:id="Rd65691fc91b84ec3"/>
-    <p:sldLayoutId xmlns:r="http://schemas.openxmlformats.org/officeDocument/2006/relationships" id="2147483652" r:id="Rfbfff30c31a244a3"/>
-    <p:sldLayoutId xmlns:r="http://schemas.openxmlformats.org/officeDocument/2006/relationships" id="2147483653" r:id="R80277943fbb64daf"/>
+    <p:sldLayoutId xmlns:r="http://schemas.openxmlformats.org/officeDocument/2006/relationships" id="2147483649" r:id="Ra9f05f878b854b45"/>
+    <p:sldLayoutId xmlns:r="http://schemas.openxmlformats.org/officeDocument/2006/relationships" id="2147483650" r:id="R058f966d00bd4fe3"/>
+    <p:sldLayoutId xmlns:r="http://schemas.openxmlformats.org/officeDocument/2006/relationships" id="2147483651" r:id="R8888beb8c0a64219"/>
+    <p:sldLayoutId xmlns:r="http://schemas.openxmlformats.org/officeDocument/2006/relationships" id="2147483652" r:id="R840911e3e80d4179"/>
+    <p:sldLayoutId xmlns:r="http://schemas.openxmlformats.org/officeDocument/2006/relationships" id="2147483653" r:id="Ra0e88e1074754611"/>
   </p:sldLayoutIdLst>
 </p:sldMaster>
 </file>
@@ -631,7 +631,7 @@
     <c:plotVisOnly val="1"/>
     <c:dispBlanksAs val="gap"/>
   </c:chart>
-  <c:externalData xmlns:r="http://schemas.openxmlformats.org/officeDocument/2006/relationships" r:id="R8efa791e9a7d4535">
+  <c:externalData xmlns:r="http://schemas.openxmlformats.org/officeDocument/2006/relationships" r:id="R254751892f7d4dfd">
     <c:autoUpdate val="0"/>
   </c:externalData>
 </c:chartSpace>
@@ -678,7 +678,7 @@
         </p:xfrm>
         <a:graphic>
           <a:graphicData uri="http://schemas.openxmlformats.org/drawingml/2006/chart">
-            <c:chart xmlns:r="http://schemas.openxmlformats.org/officeDocument/2006/relationships" xmlns:c="http://schemas.openxmlformats.org/drawingml/2006/chart" r:id="R650f389e88fc4302"/>
+            <c:chart xmlns:r="http://schemas.openxmlformats.org/officeDocument/2006/relationships" xmlns:c="http://schemas.openxmlformats.org/drawingml/2006/chart" r:id="R66618260e4804fa6"/>
           </a:graphicData>
         </a:graphic>
       </p:graphicFrame>
